--- a/PPTs/ZDELETED.pptx
+++ b/PPTs/ZDELETED.pptx
@@ -32781,9 +32781,9 @@
         <p:grpSpPr>
           <a:xfrm>
             <a:off x="4686301" y="1714500"/>
-            <a:ext cx="2679396" cy="830997"/>
+            <a:ext cx="2679396" cy="1105315"/>
             <a:chOff x="4461833" y="1619479"/>
-            <a:chExt cx="3572527" cy="1107996"/>
+            <a:chExt cx="3572527" cy="1473754"/>
           </a:xfrm>
         </p:grpSpPr>
         <p:sp>
@@ -32840,7 +32840,7 @@
           <p:spPr>
             <a:xfrm>
               <a:off x="5409282" y="1619479"/>
-              <a:ext cx="2625078" cy="1107996"/>
+              <a:ext cx="2625078" cy="1473754"/>
             </a:xfrm>
             <a:prstGeom prst="rect">
               <a:avLst/>
@@ -32908,7 +32908,31 @@
                   <a:latin typeface="Consolas" panose="020B0609020204030204" pitchFamily="49" charset="0"/>
                   <a:cs typeface="Consolas" panose="020B0609020204030204" pitchFamily="49" charset="0"/>
                 </a:rPr>
+                <a:t xml:space="preserve">     IT HI</a:t>
+              </a:r>
+            </a:p>
+            <a:p>
+              <a:r>
+                <a:rPr lang="en-US" sz="1200" dirty="0">
+                  <a:solidFill>
+                    <a:srgbClr val="FF0000"/>
+                  </a:solidFill>
+                  <a:latin typeface="Consolas" panose="020B0609020204030204" pitchFamily="49" charset="0"/>
+                  <a:cs typeface="Consolas" panose="020B0609020204030204" pitchFamily="49" charset="0"/>
+                </a:rPr>
                 <a:t>     SUBHI r0, r0, r1</a:t>
+              </a:r>
+            </a:p>
+            <a:p>
+              <a:r>
+                <a:rPr lang="en-US" sz="1200" dirty="0">
+                  <a:solidFill>
+                    <a:srgbClr val="FF0000"/>
+                  </a:solidFill>
+                  <a:latin typeface="Consolas" panose="020B0609020204030204" pitchFamily="49" charset="0"/>
+                  <a:cs typeface="Consolas" panose="020B0609020204030204" pitchFamily="49" charset="0"/>
+                </a:rPr>
+                <a:t xml:space="preserve">     IT LO</a:t>
               </a:r>
             </a:p>
             <a:p>
@@ -33313,8 +33337,8 @@
         </p:nvSpPr>
         <p:spPr bwMode="auto">
           <a:xfrm>
-            <a:off x="4810052" y="2546908"/>
-            <a:ext cx="3079900" cy="3395561"/>
+            <a:off x="4810052" y="2926080"/>
+            <a:ext cx="3079900" cy="3383280"/>
           </a:xfrm>
           <a:prstGeom prst="rect">
             <a:avLst/>
@@ -33572,7 +33596,7 @@
               <a:buNone/>
             </a:pPr>
             <a:r>
-              <a:rPr lang="en-US" sz="1350" kern="0" dirty="0">
+              <a:rPr lang="en-US" sz="1200" kern="0" dirty="0">
                 <a:solidFill>
                   <a:prstClr val="black"/>
                 </a:solidFill>
@@ -33585,7 +33609,7 @@
               <a:buNone/>
             </a:pPr>
             <a:r>
-              <a:rPr lang="en-US" sz="1350" kern="0" dirty="0">
+              <a:rPr lang="en-US" sz="1200" kern="0" dirty="0">
                 <a:solidFill>
                   <a:prstClr val="black"/>
                 </a:solidFill>
@@ -33593,7 +33617,7 @@
               <a:t>SUBHI r0, r0, r1 executes only if the previous compare set HI (unsigned “higher”), i.e., r0 &gt; r1 for unsigned </a:t>
             </a:r>
             <a:r>
-              <a:rPr lang="en-US" sz="1350" kern="0" dirty="0" err="1">
+              <a:rPr lang="en-US" sz="1200" kern="0" dirty="0" err="1">
                 <a:solidFill>
                   <a:prstClr val="black"/>
                 </a:solidFill>
@@ -33601,7 +33625,7 @@
               <a:t>ints</a:t>
             </a:r>
             <a:r>
-              <a:rPr lang="en-US" sz="1350" kern="0" dirty="0">
+              <a:rPr lang="en-US" sz="1200" kern="0" dirty="0">
                 <a:solidFill>
                   <a:prstClr val="black"/>
                 </a:solidFill>
@@ -33614,7 +33638,7 @@
               <a:buNone/>
             </a:pPr>
             <a:r>
-              <a:rPr lang="en-US" sz="1350" kern="0" dirty="0">
+              <a:rPr lang="en-US" sz="1200" kern="0" dirty="0">
                 <a:solidFill>
                   <a:prstClr val="black"/>
                 </a:solidFill>
@@ -33622,7 +33646,7 @@
               <a:t>SUBLO r1, r1, r0 executes only if the previous compare of unsigned </a:t>
             </a:r>
             <a:r>
-              <a:rPr lang="en-US" sz="1350" kern="0" dirty="0" err="1">
+              <a:rPr lang="en-US" sz="1200" kern="0" dirty="0" err="1">
                 <a:solidFill>
                   <a:prstClr val="black"/>
                 </a:solidFill>
@@ -33630,7 +33654,7 @@
               <a:t>ints</a:t>
             </a:r>
             <a:r>
-              <a:rPr lang="en-US" sz="1350" kern="0" dirty="0">
+              <a:rPr lang="en-US" sz="1200" kern="0" dirty="0">
                 <a:solidFill>
                   <a:prstClr val="black"/>
                 </a:solidFill>
@@ -33638,7 +33662,7 @@
               <a:t> set LO (unsigned “lower”), i.e., r0 &lt; r1 for unsigned </a:t>
             </a:r>
             <a:r>
-              <a:rPr lang="en-US" sz="1350" kern="0" dirty="0" err="1">
+              <a:rPr lang="en-US" sz="1200" kern="0" dirty="0" err="1">
                 <a:solidFill>
                   <a:prstClr val="black"/>
                 </a:solidFill>
@@ -33646,20 +33670,28 @@
               <a:t>ints</a:t>
             </a:r>
             <a:r>
-              <a:rPr lang="en-US" sz="1350" kern="0" dirty="0">
+              <a:rPr lang="en-US" sz="1200" kern="0" dirty="0">
                 <a:solidFill>
                   <a:prstClr val="black"/>
                 </a:solidFill>
               </a:rPr>
               <a:t> r0 and r1. Flag C=0 (“borrow”).</a:t>
             </a:r>
+            <a:r>
+              <a:rPr lang="en-US" sz="1200" kern="0" dirty="0">
+                <a:solidFill>
+                  <a:prstClr val="black"/>
+                </a:solidFill>
+              </a:rPr>
+              <a:t xml:space="preserve"> On Cortex-M each is preceded by IT (IT HI, IT LO).</a:t>
+            </a:r>
           </a:p>
           <a:p>
             <a:pPr marL="0" indent="0">
               <a:buNone/>
             </a:pPr>
             <a:r>
-              <a:rPr lang="en-US" sz="1350" kern="0" dirty="0">
+              <a:rPr lang="en-US" sz="1200" kern="0" dirty="0">
                 <a:solidFill>
                   <a:prstClr val="black"/>
                 </a:solidFill>
@@ -33667,7 +33699,7 @@
               <a:t>BNE </a:t>
             </a:r>
             <a:r>
-              <a:rPr lang="en-US" sz="1350" kern="0" dirty="0" err="1">
+              <a:rPr lang="en-US" sz="1200" kern="0" dirty="0" err="1">
                 <a:solidFill>
                   <a:prstClr val="black"/>
                 </a:solidFill>
@@ -33675,7 +33707,7 @@
               <a:t>gcd</a:t>
             </a:r>
             <a:r>
-              <a:rPr lang="en-US" sz="1350" kern="0" dirty="0">
+              <a:rPr lang="en-US" sz="1200" kern="0" dirty="0">
                 <a:solidFill>
                   <a:prstClr val="black"/>
                 </a:solidFill>
@@ -33683,7 +33715,7 @@
               <a:t> branches back to the label if Z=0 from the CMP, i.e., while r0 != r1; when they become equal, Z=1 and the loop falls through, leaving r0 == r1 == </a:t>
             </a:r>
             <a:r>
-              <a:rPr lang="en-US" sz="1350" kern="0" dirty="0" err="1">
+              <a:rPr lang="en-US" sz="1200" kern="0" dirty="0" err="1">
                 <a:solidFill>
                   <a:prstClr val="black"/>
                 </a:solidFill>
@@ -33691,14 +33723,14 @@
               <a:t>gcd</a:t>
             </a:r>
             <a:r>
-              <a:rPr lang="en-US" sz="1350" kern="0" dirty="0">
+              <a:rPr lang="en-US" sz="1200" kern="0" dirty="0">
                 <a:solidFill>
                   <a:prstClr val="black"/>
                 </a:solidFill>
               </a:rPr>
               <a:t>(a, b).</a:t>
             </a:r>
-            <a:endParaRPr lang="en-GB" sz="1350" kern="0" dirty="0">
+            <a:endParaRPr lang="en-GB" sz="1200" kern="0" dirty="0">
               <a:solidFill>
                 <a:prstClr val="black"/>
               </a:solidFill>
